--- a/2021_2_data_architect/DA_09_Docker_Kubernetes.pptx
+++ b/2021_2_data_architect/DA_09_Docker_Kubernetes.pptx
@@ -210,7 +210,7 @@
           <a:p>
             <a:fld id="{9A0257BA-3AB2-914B-B1C7-8E64980B0969}" type="datetimeFigureOut">
               <a:rPr lang="en-US" smtClean="0"/>
-              <a:t>10/1/21</a:t>
+              <a:t>8/8/24</a:t>
             </a:fld>
             <a:endParaRPr lang="en-US"/>
           </a:p>
@@ -1292,7 +1292,7 @@
           <a:p>
             <a:fld id="{58E89A2C-8675-FD42-8E16-D355BB796D05}" type="datetimeFigureOut">
               <a:rPr lang="en-US" smtClean="0"/>
-              <a:t>10/1/21</a:t>
+              <a:t>8/8/24</a:t>
             </a:fld>
             <a:endParaRPr lang="en-US"/>
           </a:p>
@@ -1490,7 +1490,7 @@
           <a:p>
             <a:fld id="{58E89A2C-8675-FD42-8E16-D355BB796D05}" type="datetimeFigureOut">
               <a:rPr lang="en-US" smtClean="0"/>
-              <a:t>10/1/21</a:t>
+              <a:t>8/8/24</a:t>
             </a:fld>
             <a:endParaRPr lang="en-US"/>
           </a:p>
@@ -1698,7 +1698,7 @@
           <a:p>
             <a:fld id="{58E89A2C-8675-FD42-8E16-D355BB796D05}" type="datetimeFigureOut">
               <a:rPr lang="en-US" smtClean="0"/>
-              <a:t>10/1/21</a:t>
+              <a:t>8/8/24</a:t>
             </a:fld>
             <a:endParaRPr lang="en-US"/>
           </a:p>
@@ -1896,7 +1896,7 @@
           <a:p>
             <a:fld id="{58E89A2C-8675-FD42-8E16-D355BB796D05}" type="datetimeFigureOut">
               <a:rPr lang="en-US" smtClean="0"/>
-              <a:t>10/1/21</a:t>
+              <a:t>8/8/24</a:t>
             </a:fld>
             <a:endParaRPr lang="en-US"/>
           </a:p>
@@ -2171,7 +2171,7 @@
           <a:p>
             <a:fld id="{58E89A2C-8675-FD42-8E16-D355BB796D05}" type="datetimeFigureOut">
               <a:rPr lang="en-US" smtClean="0"/>
-              <a:t>10/1/21</a:t>
+              <a:t>8/8/24</a:t>
             </a:fld>
             <a:endParaRPr lang="en-US"/>
           </a:p>
@@ -2436,7 +2436,7 @@
           <a:p>
             <a:fld id="{58E89A2C-8675-FD42-8E16-D355BB796D05}" type="datetimeFigureOut">
               <a:rPr lang="en-US" smtClean="0"/>
-              <a:t>10/1/21</a:t>
+              <a:t>8/8/24</a:t>
             </a:fld>
             <a:endParaRPr lang="en-US"/>
           </a:p>
@@ -2848,7 +2848,7 @@
           <a:p>
             <a:fld id="{58E89A2C-8675-FD42-8E16-D355BB796D05}" type="datetimeFigureOut">
               <a:rPr lang="en-US" smtClean="0"/>
-              <a:t>10/1/21</a:t>
+              <a:t>8/8/24</a:t>
             </a:fld>
             <a:endParaRPr lang="en-US"/>
           </a:p>
@@ -2989,7 +2989,7 @@
           <a:p>
             <a:fld id="{58E89A2C-8675-FD42-8E16-D355BB796D05}" type="datetimeFigureOut">
               <a:rPr lang="en-US" smtClean="0"/>
-              <a:t>10/1/21</a:t>
+              <a:t>8/8/24</a:t>
             </a:fld>
             <a:endParaRPr lang="en-US"/>
           </a:p>
@@ -3102,7 +3102,7 @@
           <a:p>
             <a:fld id="{58E89A2C-8675-FD42-8E16-D355BB796D05}" type="datetimeFigureOut">
               <a:rPr lang="en-US" smtClean="0"/>
-              <a:t>10/1/21</a:t>
+              <a:t>8/8/24</a:t>
             </a:fld>
             <a:endParaRPr lang="en-US"/>
           </a:p>
@@ -3413,7 +3413,7 @@
           <a:p>
             <a:fld id="{58E89A2C-8675-FD42-8E16-D355BB796D05}" type="datetimeFigureOut">
               <a:rPr lang="en-US" smtClean="0"/>
-              <a:t>10/1/21</a:t>
+              <a:t>8/8/24</a:t>
             </a:fld>
             <a:endParaRPr lang="en-US"/>
           </a:p>
@@ -3701,7 +3701,7 @@
           <a:p>
             <a:fld id="{58E89A2C-8675-FD42-8E16-D355BB796D05}" type="datetimeFigureOut">
               <a:rPr lang="en-US" smtClean="0"/>
-              <a:t>10/1/21</a:t>
+              <a:t>8/8/24</a:t>
             </a:fld>
             <a:endParaRPr lang="en-US"/>
           </a:p>
@@ -3942,7 +3942,7 @@
           <a:p>
             <a:fld id="{58E89A2C-8675-FD42-8E16-D355BB796D05}" type="datetimeFigureOut">
               <a:rPr lang="en-US" smtClean="0"/>
-              <a:t>10/1/21</a:t>
+              <a:t>8/8/24</a:t>
             </a:fld>
             <a:endParaRPr lang="en-US"/>
           </a:p>
@@ -7762,9 +7762,16 @@
           <a:prstGeom prst="rect">
             <a:avLst/>
           </a:prstGeom>
-          <a:noFill/>
+          <a:solidFill>
+            <a:schemeClr val="accent4">
+              <a:lumMod val="20000"/>
+              <a:lumOff val="80000"/>
+            </a:schemeClr>
+          </a:solidFill>
           <a:ln>
-            <a:noFill/>
+            <a:solidFill>
+              <a:srgbClr val="FF0000"/>
+            </a:solidFill>
           </a:ln>
         </p:spPr>
         <p:txBody>
@@ -8404,14 +8411,21 @@
         <p:spPr>
           <a:xfrm>
             <a:off x="161200" y="720971"/>
-            <a:ext cx="5571385" cy="4747844"/>
+            <a:ext cx="5388995" cy="4747844"/>
           </a:xfrm>
           <a:prstGeom prst="rect">
             <a:avLst/>
           </a:prstGeom>
-          <a:noFill/>
+          <a:solidFill>
+            <a:schemeClr val="accent4">
+              <a:lumMod val="20000"/>
+              <a:lumOff val="80000"/>
+            </a:schemeClr>
+          </a:solidFill>
           <a:ln>
-            <a:noFill/>
+            <a:solidFill>
+              <a:srgbClr val="FF0000"/>
+            </a:solidFill>
           </a:ln>
         </p:spPr>
         <p:txBody>
@@ -8766,15 +8780,22 @@
         </p:nvSpPr>
         <p:spPr>
           <a:xfrm>
-            <a:off x="5841030" y="720971"/>
+            <a:off x="5679830" y="720971"/>
             <a:ext cx="6350970" cy="3692767"/>
           </a:xfrm>
           <a:prstGeom prst="rect">
             <a:avLst/>
           </a:prstGeom>
-          <a:noFill/>
+          <a:solidFill>
+            <a:schemeClr val="accent4">
+              <a:lumMod val="20000"/>
+              <a:lumOff val="80000"/>
+            </a:schemeClr>
+          </a:solidFill>
           <a:ln>
-            <a:noFill/>
+            <a:solidFill>
+              <a:srgbClr val="FF0000"/>
+            </a:solidFill>
           </a:ln>
         </p:spPr>
         <p:txBody>
@@ -9062,220 +9083,29 @@
         </p:nvSpPr>
         <p:spPr>
           <a:xfrm>
-            <a:off x="0" y="733246"/>
-            <a:ext cx="12027109" cy="6093976"/>
+            <a:off x="202018" y="3007510"/>
+            <a:ext cx="11408735" cy="3785652"/>
           </a:xfrm>
           <a:prstGeom prst="rect">
             <a:avLst/>
           </a:prstGeom>
-          <a:noFill/>
+          <a:solidFill>
+            <a:schemeClr val="accent4">
+              <a:lumMod val="20000"/>
+              <a:lumOff val="80000"/>
+            </a:schemeClr>
+          </a:solidFill>
+          <a:ln>
+            <a:solidFill>
+              <a:srgbClr val="FF0000"/>
+            </a:solidFill>
+          </a:ln>
         </p:spPr>
         <p:txBody>
           <a:bodyPr wrap="square" rtlCol="0">
             <a:spAutoFit/>
           </a:bodyPr>
           <a:lstStyle/>
-          <a:p>
-            <a:r>
-              <a:rPr lang="en-US" sz="1000" dirty="0">
-                <a:latin typeface="Andale Mono" panose="020B0509000000000004" pitchFamily="49" charset="0"/>
-              </a:rPr>
-              <a:t>Nice tutorial for Mac and Linux</a:t>
-            </a:r>
-            <a:endParaRPr lang="en-US" sz="1000" dirty="0">
-              <a:latin typeface="Andale Mono" panose="020B0509000000000004" pitchFamily="49" charset="0"/>
-              <a:hlinkClick r:id="rId3"/>
-            </a:endParaRPr>
-          </a:p>
-          <a:p>
-            <a:r>
-              <a:rPr lang="en-US" sz="1000" dirty="0">
-                <a:latin typeface="Andale Mono" panose="020B0509000000000004" pitchFamily="49" charset="0"/>
-                <a:hlinkClick r:id="rId3"/>
-              </a:rPr>
-              <a:t>https://www.youtube.com/watch?v=JprTjTViaEA</a:t>
-            </a:r>
-            <a:r>
-              <a:rPr lang="en-US" sz="1000" dirty="0">
-                <a:latin typeface="Andale Mono" panose="020B0509000000000004" pitchFamily="49" charset="0"/>
-              </a:rPr>
-              <a:t> </a:t>
-            </a:r>
-          </a:p>
-          <a:p>
-            <a:endParaRPr lang="en-US" sz="1000" dirty="0">
-              <a:latin typeface="Andale Mono" panose="020B0509000000000004" pitchFamily="49" charset="0"/>
-            </a:endParaRPr>
-          </a:p>
-          <a:p>
-            <a:r>
-              <a:rPr lang="en-US" sz="1000" dirty="0">
-                <a:latin typeface="Andale Mono" panose="020B0509000000000004" pitchFamily="49" charset="0"/>
-              </a:rPr>
-              <a:t>Download docker for Mac – file </a:t>
-            </a:r>
-            <a:r>
-              <a:rPr lang="en-US" sz="1000" dirty="0" err="1">
-                <a:latin typeface="Andale Mono" panose="020B0509000000000004" pitchFamily="49" charset="0"/>
-              </a:rPr>
-              <a:t>Docker.dmg</a:t>
-            </a:r>
-            <a:r>
-              <a:rPr lang="en-US" sz="1000" dirty="0">
-                <a:latin typeface="Andale Mono" panose="020B0509000000000004" pitchFamily="49" charset="0"/>
-              </a:rPr>
-              <a:t> :</a:t>
-            </a:r>
-          </a:p>
-          <a:p>
-            <a:r>
-              <a:rPr lang="en-US" sz="1000" dirty="0">
-                <a:latin typeface="Andale Mono" panose="020B0509000000000004" pitchFamily="49" charset="0"/>
-                <a:hlinkClick r:id="rId4"/>
-              </a:rPr>
-              <a:t>https://hub.docker.com/editions/community/docker-ce-desktop-mac</a:t>
-            </a:r>
-            <a:r>
-              <a:rPr lang="en-US" sz="1000" dirty="0">
-                <a:latin typeface="Andale Mono" panose="020B0509000000000004" pitchFamily="49" charset="0"/>
-              </a:rPr>
-              <a:t> </a:t>
-            </a:r>
-          </a:p>
-          <a:p>
-            <a:endParaRPr lang="en-US" sz="1000" dirty="0">
-              <a:latin typeface="Andale Mono" panose="020B0509000000000004" pitchFamily="49" charset="0"/>
-            </a:endParaRPr>
-          </a:p>
-          <a:p>
-            <a:r>
-              <a:rPr lang="en-US" sz="1000" dirty="0">
-                <a:latin typeface="Andale Mono" panose="020B0509000000000004" pitchFamily="49" charset="0"/>
-              </a:rPr>
-              <a:t>Install it – now you have </a:t>
-            </a:r>
-            <a:r>
-              <a:rPr lang="en-US" sz="1000" dirty="0" err="1">
-                <a:latin typeface="Andale Mono" panose="020B0509000000000004" pitchFamily="49" charset="0"/>
-              </a:rPr>
-              <a:t>Docker.app</a:t>
-            </a:r>
-            <a:r>
-              <a:rPr lang="en-US" sz="1000" dirty="0">
-                <a:latin typeface="Andale Mono" panose="020B0509000000000004" pitchFamily="49" charset="0"/>
-              </a:rPr>
-              <a:t> in Applications</a:t>
-            </a:r>
-          </a:p>
-          <a:p>
-            <a:r>
-              <a:rPr lang="en-US" sz="1000" dirty="0">
-                <a:latin typeface="Andale Mono" panose="020B0509000000000004" pitchFamily="49" charset="0"/>
-              </a:rPr>
-              <a:t>Run it, a docker icon will appear on the top bar of Mac desktop.</a:t>
-            </a:r>
-          </a:p>
-          <a:p>
-            <a:r>
-              <a:rPr lang="en-US" sz="1000" dirty="0">
-                <a:latin typeface="Andale Mono" panose="020B0509000000000004" pitchFamily="49" charset="0"/>
-              </a:rPr>
-              <a:t>It will ask to login using your login/password at </a:t>
-            </a:r>
-            <a:r>
-              <a:rPr lang="en-US" sz="1000" dirty="0" err="1">
-                <a:latin typeface="Andale Mono" panose="020B0509000000000004" pitchFamily="49" charset="0"/>
-              </a:rPr>
-              <a:t>docker.com</a:t>
-            </a:r>
-            <a:endParaRPr lang="en-US" sz="1000" dirty="0">
-              <a:latin typeface="Andale Mono" panose="020B0509000000000004" pitchFamily="49" charset="0"/>
-            </a:endParaRPr>
-          </a:p>
-          <a:p>
-            <a:r>
-              <a:rPr lang="en-US" sz="1000" dirty="0">
-                <a:latin typeface="Andale Mono" panose="020B0509000000000004" pitchFamily="49" charset="0"/>
-              </a:rPr>
-              <a:t>Now you can open terminal and run docker commands:</a:t>
-            </a:r>
-          </a:p>
-          <a:p>
-            <a:endParaRPr lang="en-US" sz="1000" dirty="0">
-              <a:latin typeface="Andale Mono" panose="020B0509000000000004" pitchFamily="49" charset="0"/>
-            </a:endParaRPr>
-          </a:p>
-          <a:p>
-            <a:r>
-              <a:rPr lang="en-US" sz="1000" dirty="0">
-                <a:solidFill>
-                  <a:srgbClr val="0070C0"/>
-                </a:solidFill>
-                <a:latin typeface="Andale Mono" panose="020B0509000000000004" pitchFamily="49" charset="0"/>
-              </a:rPr>
-              <a:t>docker –version</a:t>
-            </a:r>
-            <a:r>
-              <a:rPr lang="en-US" sz="1000" dirty="0">
-                <a:solidFill>
-                  <a:srgbClr val="00B050"/>
-                </a:solidFill>
-                <a:latin typeface="Andale Mono" panose="020B0509000000000004" pitchFamily="49" charset="0"/>
-              </a:rPr>
-              <a:t>     # 20.10.8</a:t>
-            </a:r>
-          </a:p>
-          <a:p>
-            <a:r>
-              <a:rPr lang="en-US" sz="1000" dirty="0">
-                <a:solidFill>
-                  <a:srgbClr val="0070C0"/>
-                </a:solidFill>
-                <a:latin typeface="Andale Mono" panose="020B0509000000000004" pitchFamily="49" charset="0"/>
-              </a:rPr>
-              <a:t>docker run hello-world</a:t>
-            </a:r>
-          </a:p>
-          <a:p>
-            <a:r>
-              <a:rPr lang="en-US" sz="1000" dirty="0">
-                <a:solidFill>
-                  <a:srgbClr val="0070C0"/>
-                </a:solidFill>
-                <a:latin typeface="Andale Mono" panose="020B0509000000000004" pitchFamily="49" charset="0"/>
-              </a:rPr>
-              <a:t>docker </a:t>
-            </a:r>
-            <a:r>
-              <a:rPr lang="en-US" sz="1000" dirty="0" err="1">
-                <a:solidFill>
-                  <a:srgbClr val="0070C0"/>
-                </a:solidFill>
-                <a:latin typeface="Andale Mono" panose="020B0509000000000004" pitchFamily="49" charset="0"/>
-              </a:rPr>
-              <a:t>ps</a:t>
-            </a:r>
-            <a:r>
-              <a:rPr lang="en-US" sz="1000" dirty="0">
-                <a:solidFill>
-                  <a:srgbClr val="0070C0"/>
-                </a:solidFill>
-                <a:latin typeface="Andale Mono" panose="020B0509000000000004" pitchFamily="49" charset="0"/>
-              </a:rPr>
-              <a:t> –a   # shows all running and exited containers</a:t>
-            </a:r>
-          </a:p>
-          <a:p>
-            <a:r>
-              <a:rPr lang="en-US" sz="1000" dirty="0">
-                <a:solidFill>
-                  <a:srgbClr val="0070C0"/>
-                </a:solidFill>
-                <a:latin typeface="Andale Mono" panose="020B0509000000000004" pitchFamily="49" charset="0"/>
-              </a:rPr>
-              <a:t>docker run --name my-hello hello-world</a:t>
-            </a:r>
-          </a:p>
           <a:p>
             <a:r>
               <a:rPr lang="en-US" sz="1000" dirty="0">
@@ -9739,7 +9569,17 @@
           <a:prstGeom prst="rect">
             <a:avLst/>
           </a:prstGeom>
-          <a:noFill/>
+          <a:solidFill>
+            <a:schemeClr val="accent4">
+              <a:lumMod val="20000"/>
+              <a:lumOff val="80000"/>
+            </a:schemeClr>
+          </a:solidFill>
+          <a:ln>
+            <a:solidFill>
+              <a:srgbClr val="FF0000"/>
+            </a:solidFill>
+          </a:ln>
         </p:spPr>
         <p:txBody>
           <a:bodyPr wrap="square" rtlCol="0">
@@ -9759,7 +9599,7 @@
             </a:r>
             <a:r>
               <a:rPr lang="en-US" sz="1200" dirty="0">
-                <a:hlinkClick r:id="rId5"/>
+                <a:hlinkClick r:id="rId3"/>
               </a:rPr>
               <a:t>https://docs.docker.com/get-started/</a:t>
             </a:r>
@@ -9778,7 +9618,7 @@
             </a:r>
             <a:r>
               <a:rPr lang="en-US" sz="1200" dirty="0">
-                <a:hlinkClick r:id="rId6"/>
+                <a:hlinkClick r:id="rId4"/>
               </a:rPr>
               <a:t>https://medium.com/@patrickmichelberger/getting-started-with-anaconda-docker-b50a2c482139</a:t>
             </a:r>
@@ -9797,7 +9637,7 @@
             </a:r>
             <a:r>
               <a:rPr lang="en-US" sz="1200" dirty="0">
-                <a:hlinkClick r:id="rId7"/>
+                <a:hlinkClick r:id="rId5"/>
               </a:rPr>
               <a:t> https://jonnylangefeld.github.io/learning/Docker/How%2Bto%2BDocker.html</a:t>
             </a:r>
@@ -9819,7 +9659,7 @@
             </a:r>
             <a:r>
               <a:rPr lang="en-US" sz="1200" dirty="0">
-                <a:hlinkClick r:id="rId8"/>
+                <a:hlinkClick r:id="rId6"/>
               </a:rPr>
               <a:t>https://docs.docker.com/engine/reference/run/</a:t>
             </a:r>
@@ -9846,11 +9686,251 @@
             </a:r>
             <a:r>
               <a:rPr lang="en-US" sz="1200" dirty="0">
+                <a:hlinkClick r:id="rId7"/>
+              </a:rPr>
+              <a:t>https://docs.docker.com/engine/reference/builder/</a:t>
+            </a:r>
+            <a:endParaRPr lang="en-US" sz="1200" dirty="0"/>
+          </a:p>
+        </p:txBody>
+      </p:sp>
+      <p:sp>
+        <p:nvSpPr>
+          <p:cNvPr id="2" name="TextBox 1">
+            <a:extLst>
+              <a:ext uri="{FF2B5EF4-FFF2-40B4-BE49-F238E27FC236}">
+                <a16:creationId xmlns:a16="http://schemas.microsoft.com/office/drawing/2014/main" id="{A3DEAC50-F813-6C19-462C-0482E5851A80}"/>
+              </a:ext>
+            </a:extLst>
+          </p:cNvPr>
+          <p:cNvSpPr txBox="1"/>
+          <p:nvPr/>
+        </p:nvSpPr>
+        <p:spPr>
+          <a:xfrm>
+            <a:off x="202018" y="605655"/>
+            <a:ext cx="5571461" cy="2400657"/>
+          </a:xfrm>
+          <a:prstGeom prst="rect">
+            <a:avLst/>
+          </a:prstGeom>
+          <a:solidFill>
+            <a:schemeClr val="accent4">
+              <a:lumMod val="20000"/>
+              <a:lumOff val="80000"/>
+            </a:schemeClr>
+          </a:solidFill>
+          <a:ln>
+            <a:solidFill>
+              <a:srgbClr val="FF0000"/>
+            </a:solidFill>
+          </a:ln>
+        </p:spPr>
+        <p:txBody>
+          <a:bodyPr wrap="square" rtlCol="0">
+            <a:spAutoFit/>
+          </a:bodyPr>
+          <a:lstStyle/>
+          <a:p>
+            <a:r>
+              <a:rPr lang="en-US" sz="1000" dirty="0">
+                <a:latin typeface="Andale Mono" panose="020B0509000000000004" pitchFamily="49" charset="0"/>
+              </a:rPr>
+              <a:t>Nice tutorial for Mac and Linux</a:t>
+            </a:r>
+            <a:endParaRPr lang="en-US" sz="1000" dirty="0">
+              <a:latin typeface="Andale Mono" panose="020B0509000000000004" pitchFamily="49" charset="0"/>
+              <a:hlinkClick r:id="rId8"/>
+            </a:endParaRPr>
+          </a:p>
+          <a:p>
+            <a:r>
+              <a:rPr lang="en-US" sz="1000" dirty="0">
+                <a:latin typeface="Andale Mono" panose="020B0509000000000004" pitchFamily="49" charset="0"/>
+                <a:hlinkClick r:id="rId8"/>
+              </a:rPr>
+              <a:t>https://www.youtube.com/watch?v=JprTjTViaEA</a:t>
+            </a:r>
+            <a:r>
+              <a:rPr lang="en-US" sz="1000" dirty="0">
+                <a:latin typeface="Andale Mono" panose="020B0509000000000004" pitchFamily="49" charset="0"/>
+              </a:rPr>
+              <a:t> </a:t>
+            </a:r>
+          </a:p>
+          <a:p>
+            <a:endParaRPr lang="en-US" sz="1000" dirty="0">
+              <a:latin typeface="Andale Mono" panose="020B0509000000000004" pitchFamily="49" charset="0"/>
+            </a:endParaRPr>
+          </a:p>
+          <a:p>
+            <a:r>
+              <a:rPr lang="en-US" sz="1000" dirty="0">
+                <a:latin typeface="Andale Mono" panose="020B0509000000000004" pitchFamily="49" charset="0"/>
+              </a:rPr>
+              <a:t>Download docker for Mac – file </a:t>
+            </a:r>
+            <a:r>
+              <a:rPr lang="en-US" sz="1000" dirty="0" err="1">
+                <a:latin typeface="Andale Mono" panose="020B0509000000000004" pitchFamily="49" charset="0"/>
+              </a:rPr>
+              <a:t>Docker.dmg</a:t>
+            </a:r>
+            <a:r>
+              <a:rPr lang="en-US" sz="1000" dirty="0">
+                <a:latin typeface="Andale Mono" panose="020B0509000000000004" pitchFamily="49" charset="0"/>
+              </a:rPr>
+              <a:t> :</a:t>
+            </a:r>
+          </a:p>
+          <a:p>
+            <a:r>
+              <a:rPr lang="en-US" sz="1000" dirty="0">
+                <a:latin typeface="Andale Mono" panose="020B0509000000000004" pitchFamily="49" charset="0"/>
                 <a:hlinkClick r:id="rId9"/>
               </a:rPr>
-              <a:t>https://docs.docker.com/engine/reference/builder/</a:t>
-            </a:r>
-            <a:endParaRPr lang="en-US" sz="1200" dirty="0"/>
+              <a:t>https://hub.docker.com/editions/community/docker-ce-desktop-mac</a:t>
+            </a:r>
+            <a:r>
+              <a:rPr lang="en-US" sz="1000" dirty="0">
+                <a:latin typeface="Andale Mono" panose="020B0509000000000004" pitchFamily="49" charset="0"/>
+              </a:rPr>
+              <a:t> </a:t>
+            </a:r>
+          </a:p>
+          <a:p>
+            <a:endParaRPr lang="en-US" sz="1000" dirty="0">
+              <a:latin typeface="Andale Mono" panose="020B0509000000000004" pitchFamily="49" charset="0"/>
+            </a:endParaRPr>
+          </a:p>
+          <a:p>
+            <a:r>
+              <a:rPr lang="en-US" sz="1000" dirty="0">
+                <a:latin typeface="Andale Mono" panose="020B0509000000000004" pitchFamily="49" charset="0"/>
+              </a:rPr>
+              <a:t>Install it – now you have </a:t>
+            </a:r>
+            <a:r>
+              <a:rPr lang="en-US" sz="1000" dirty="0" err="1">
+                <a:latin typeface="Andale Mono" panose="020B0509000000000004" pitchFamily="49" charset="0"/>
+              </a:rPr>
+              <a:t>Docker.app</a:t>
+            </a:r>
+            <a:r>
+              <a:rPr lang="en-US" sz="1000" dirty="0">
+                <a:latin typeface="Andale Mono" panose="020B0509000000000004" pitchFamily="49" charset="0"/>
+              </a:rPr>
+              <a:t> in Applications</a:t>
+            </a:r>
+          </a:p>
+          <a:p>
+            <a:r>
+              <a:rPr lang="en-US" sz="1000" dirty="0">
+                <a:latin typeface="Andale Mono" panose="020B0509000000000004" pitchFamily="49" charset="0"/>
+              </a:rPr>
+              <a:t>Run it, a docker icon will appear on the top bar of Mac desktop.</a:t>
+            </a:r>
+          </a:p>
+          <a:p>
+            <a:r>
+              <a:rPr lang="en-US" sz="1000" dirty="0">
+                <a:latin typeface="Andale Mono" panose="020B0509000000000004" pitchFamily="49" charset="0"/>
+              </a:rPr>
+              <a:t>It will ask to login using your login/password at </a:t>
+            </a:r>
+            <a:r>
+              <a:rPr lang="en-US" sz="1000" dirty="0" err="1">
+                <a:latin typeface="Andale Mono" panose="020B0509000000000004" pitchFamily="49" charset="0"/>
+              </a:rPr>
+              <a:t>docker.com</a:t>
+            </a:r>
+            <a:endParaRPr lang="en-US" sz="1000" dirty="0">
+              <a:latin typeface="Andale Mono" panose="020B0509000000000004" pitchFamily="49" charset="0"/>
+            </a:endParaRPr>
+          </a:p>
+          <a:p>
+            <a:r>
+              <a:rPr lang="en-US" sz="1000" dirty="0">
+                <a:latin typeface="Andale Mono" panose="020B0509000000000004" pitchFamily="49" charset="0"/>
+              </a:rPr>
+              <a:t>Now you can open terminal and run docker commands:</a:t>
+            </a:r>
+          </a:p>
+          <a:p>
+            <a:endParaRPr lang="en-US" sz="1000" dirty="0">
+              <a:latin typeface="Andale Mono" panose="020B0509000000000004" pitchFamily="49" charset="0"/>
+            </a:endParaRPr>
+          </a:p>
+          <a:p>
+            <a:r>
+              <a:rPr lang="en-US" sz="1000" dirty="0">
+                <a:solidFill>
+                  <a:srgbClr val="0070C0"/>
+                </a:solidFill>
+                <a:latin typeface="Andale Mono" panose="020B0509000000000004" pitchFamily="49" charset="0"/>
+              </a:rPr>
+              <a:t>docker –version</a:t>
+            </a:r>
+            <a:r>
+              <a:rPr lang="en-US" sz="1000" dirty="0">
+                <a:solidFill>
+                  <a:srgbClr val="00B050"/>
+                </a:solidFill>
+                <a:latin typeface="Andale Mono" panose="020B0509000000000004" pitchFamily="49" charset="0"/>
+              </a:rPr>
+              <a:t>     # 20.10.8</a:t>
+            </a:r>
+          </a:p>
+          <a:p>
+            <a:r>
+              <a:rPr lang="en-US" sz="1000" dirty="0">
+                <a:solidFill>
+                  <a:srgbClr val="0070C0"/>
+                </a:solidFill>
+                <a:latin typeface="Andale Mono" panose="020B0509000000000004" pitchFamily="49" charset="0"/>
+              </a:rPr>
+              <a:t>docker run hello-world</a:t>
+            </a:r>
+          </a:p>
+          <a:p>
+            <a:r>
+              <a:rPr lang="en-US" sz="1000" dirty="0">
+                <a:solidFill>
+                  <a:srgbClr val="0070C0"/>
+                </a:solidFill>
+                <a:latin typeface="Andale Mono" panose="020B0509000000000004" pitchFamily="49" charset="0"/>
+              </a:rPr>
+              <a:t>docker </a:t>
+            </a:r>
+            <a:r>
+              <a:rPr lang="en-US" sz="1000" dirty="0" err="1">
+                <a:solidFill>
+                  <a:srgbClr val="0070C0"/>
+                </a:solidFill>
+                <a:latin typeface="Andale Mono" panose="020B0509000000000004" pitchFamily="49" charset="0"/>
+              </a:rPr>
+              <a:t>ps</a:t>
+            </a:r>
+            <a:r>
+              <a:rPr lang="en-US" sz="1000" dirty="0">
+                <a:solidFill>
+                  <a:srgbClr val="0070C0"/>
+                </a:solidFill>
+                <a:latin typeface="Andale Mono" panose="020B0509000000000004" pitchFamily="49" charset="0"/>
+              </a:rPr>
+              <a:t> –a   # shows all running and exited containers</a:t>
+            </a:r>
+          </a:p>
+          <a:p>
+            <a:r>
+              <a:rPr lang="en-US" sz="1000" dirty="0">
+                <a:solidFill>
+                  <a:srgbClr val="0070C0"/>
+                </a:solidFill>
+                <a:latin typeface="Andale Mono" panose="020B0509000000000004" pitchFamily="49" charset="0"/>
+              </a:rPr>
+              <a:t>docker run --name my-hello hello-world</a:t>
+            </a:r>
           </a:p>
         </p:txBody>
       </p:sp>
@@ -10988,12 +11068,17 @@
         </p:blipFill>
         <p:spPr>
           <a:xfrm>
-            <a:off x="1693888" y="2068642"/>
-            <a:ext cx="7495082" cy="3897443"/>
+            <a:off x="173432" y="1284300"/>
+            <a:ext cx="7406203" cy="3851226"/>
           </a:xfrm>
           <a:prstGeom prst="rect">
             <a:avLst/>
           </a:prstGeom>
+          <a:ln>
+            <a:solidFill>
+              <a:srgbClr val="FF0000"/>
+            </a:solidFill>
+          </a:ln>
         </p:spPr>
       </p:pic>
       <p:sp>
@@ -11010,7 +11095,7 @@
         </p:nvSpPr>
         <p:spPr>
           <a:xfrm>
-            <a:off x="3665095" y="1514006"/>
+            <a:off x="2123374" y="637968"/>
             <a:ext cx="2923082" cy="369332"/>
           </a:xfrm>
           <a:prstGeom prst="rect">
@@ -11028,6 +11113,398 @@
               <a:rPr lang="en-US" dirty="0"/>
               <a:t>Recap: Docker commands</a:t>
             </a:r>
+          </a:p>
+        </p:txBody>
+      </p:sp>
+      <p:sp>
+        <p:nvSpPr>
+          <p:cNvPr id="5" name="TextBox 4">
+            <a:extLst>
+              <a:ext uri="{FF2B5EF4-FFF2-40B4-BE49-F238E27FC236}">
+                <a16:creationId xmlns:a16="http://schemas.microsoft.com/office/drawing/2014/main" id="{A94B6986-BE3A-DED1-7AE9-F80346078F4E}"/>
+              </a:ext>
+            </a:extLst>
+          </p:cNvPr>
+          <p:cNvSpPr txBox="1"/>
+          <p:nvPr/>
+        </p:nvSpPr>
+        <p:spPr>
+          <a:xfrm>
+            <a:off x="7804298" y="1284299"/>
+            <a:ext cx="4214270" cy="2492990"/>
+          </a:xfrm>
+          <a:prstGeom prst="rect">
+            <a:avLst/>
+          </a:prstGeom>
+          <a:solidFill>
+            <a:schemeClr val="accent4">
+              <a:lumMod val="20000"/>
+              <a:lumOff val="80000"/>
+            </a:schemeClr>
+          </a:solidFill>
+          <a:ln>
+            <a:solidFill>
+              <a:srgbClr val="FF0000"/>
+            </a:solidFill>
+          </a:ln>
+        </p:spPr>
+        <p:txBody>
+          <a:bodyPr wrap="square" rtlCol="0">
+            <a:spAutoFit/>
+          </a:bodyPr>
+          <a:lstStyle/>
+          <a:p>
+            <a:r>
+              <a:rPr lang="en-US" sz="1200" dirty="0">
+                <a:solidFill>
+                  <a:srgbClr val="0070C0"/>
+                </a:solidFill>
+                <a:latin typeface="Menlo" panose="020B0609030804020204" pitchFamily="49" charset="0"/>
+                <a:ea typeface="Menlo" panose="020B0609030804020204" pitchFamily="49" charset="0"/>
+                <a:cs typeface="Menlo" panose="020B0609030804020204" pitchFamily="49" charset="0"/>
+              </a:rPr>
+              <a:t>docker run </a:t>
+            </a:r>
+            <a:r>
+              <a:rPr lang="en-US" sz="1200" dirty="0" err="1">
+                <a:solidFill>
+                  <a:srgbClr val="0070C0"/>
+                </a:solidFill>
+                <a:latin typeface="Menlo" panose="020B0609030804020204" pitchFamily="49" charset="0"/>
+                <a:ea typeface="Menlo" panose="020B0609030804020204" pitchFamily="49" charset="0"/>
+                <a:cs typeface="Menlo" panose="020B0609030804020204" pitchFamily="49" charset="0"/>
+              </a:rPr>
+              <a:t>mycontainer</a:t>
+            </a:r>
+            <a:endParaRPr lang="en-US" sz="1200" dirty="0">
+              <a:solidFill>
+                <a:srgbClr val="0070C0"/>
+              </a:solidFill>
+              <a:latin typeface="Menlo" panose="020B0609030804020204" pitchFamily="49" charset="0"/>
+              <a:ea typeface="Menlo" panose="020B0609030804020204" pitchFamily="49" charset="0"/>
+              <a:cs typeface="Menlo" panose="020B0609030804020204" pitchFamily="49" charset="0"/>
+            </a:endParaRPr>
+          </a:p>
+          <a:p>
+            <a:endParaRPr lang="en-US" sz="1200" dirty="0">
+              <a:solidFill>
+                <a:srgbClr val="0070C0"/>
+              </a:solidFill>
+              <a:latin typeface="Menlo" panose="020B0609030804020204" pitchFamily="49" charset="0"/>
+              <a:ea typeface="Menlo" panose="020B0609030804020204" pitchFamily="49" charset="0"/>
+              <a:cs typeface="Menlo" panose="020B0609030804020204" pitchFamily="49" charset="0"/>
+            </a:endParaRPr>
+          </a:p>
+          <a:p>
+            <a:r>
+              <a:rPr lang="en-US" sz="1200" dirty="0">
+                <a:solidFill>
+                  <a:srgbClr val="0070C0"/>
+                </a:solidFill>
+                <a:latin typeface="Menlo" panose="020B0609030804020204" pitchFamily="49" charset="0"/>
+                <a:ea typeface="Menlo" panose="020B0609030804020204" pitchFamily="49" charset="0"/>
+                <a:cs typeface="Menlo" panose="020B0609030804020204" pitchFamily="49" charset="0"/>
+              </a:rPr>
+              <a:t>docker pause </a:t>
+            </a:r>
+            <a:r>
+              <a:rPr lang="en-US" sz="1200" dirty="0" err="1">
+                <a:solidFill>
+                  <a:srgbClr val="0070C0"/>
+                </a:solidFill>
+                <a:latin typeface="Menlo" panose="020B0609030804020204" pitchFamily="49" charset="0"/>
+                <a:ea typeface="Menlo" panose="020B0609030804020204" pitchFamily="49" charset="0"/>
+                <a:cs typeface="Menlo" panose="020B0609030804020204" pitchFamily="49" charset="0"/>
+              </a:rPr>
+              <a:t>mycontainer</a:t>
+            </a:r>
+            <a:endParaRPr lang="en-US" sz="1200" dirty="0">
+              <a:solidFill>
+                <a:srgbClr val="0070C0"/>
+              </a:solidFill>
+              <a:latin typeface="Menlo" panose="020B0609030804020204" pitchFamily="49" charset="0"/>
+              <a:ea typeface="Menlo" panose="020B0609030804020204" pitchFamily="49" charset="0"/>
+              <a:cs typeface="Menlo" panose="020B0609030804020204" pitchFamily="49" charset="0"/>
+            </a:endParaRPr>
+          </a:p>
+          <a:p>
+            <a:r>
+              <a:rPr lang="en-US" sz="1200" dirty="0">
+                <a:solidFill>
+                  <a:srgbClr val="0070C0"/>
+                </a:solidFill>
+                <a:latin typeface="Menlo" panose="020B0609030804020204" pitchFamily="49" charset="0"/>
+                <a:ea typeface="Menlo" panose="020B0609030804020204" pitchFamily="49" charset="0"/>
+                <a:cs typeface="Menlo" panose="020B0609030804020204" pitchFamily="49" charset="0"/>
+              </a:rPr>
+              <a:t>docker </a:t>
+            </a:r>
+            <a:r>
+              <a:rPr lang="en-US" sz="1200" dirty="0" err="1">
+                <a:solidFill>
+                  <a:srgbClr val="0070C0"/>
+                </a:solidFill>
+                <a:latin typeface="Menlo" panose="020B0609030804020204" pitchFamily="49" charset="0"/>
+                <a:ea typeface="Menlo" panose="020B0609030804020204" pitchFamily="49" charset="0"/>
+                <a:cs typeface="Menlo" panose="020B0609030804020204" pitchFamily="49" charset="0"/>
+              </a:rPr>
+              <a:t>unpause</a:t>
+            </a:r>
+            <a:r>
+              <a:rPr lang="en-US" sz="1200" dirty="0">
+                <a:solidFill>
+                  <a:srgbClr val="0070C0"/>
+                </a:solidFill>
+                <a:latin typeface="Menlo" panose="020B0609030804020204" pitchFamily="49" charset="0"/>
+                <a:ea typeface="Menlo" panose="020B0609030804020204" pitchFamily="49" charset="0"/>
+                <a:cs typeface="Menlo" panose="020B0609030804020204" pitchFamily="49" charset="0"/>
+              </a:rPr>
+              <a:t> </a:t>
+            </a:r>
+            <a:r>
+              <a:rPr lang="en-US" sz="1200" dirty="0" err="1">
+                <a:solidFill>
+                  <a:srgbClr val="0070C0"/>
+                </a:solidFill>
+                <a:latin typeface="Menlo" panose="020B0609030804020204" pitchFamily="49" charset="0"/>
+                <a:ea typeface="Menlo" panose="020B0609030804020204" pitchFamily="49" charset="0"/>
+                <a:cs typeface="Menlo" panose="020B0609030804020204" pitchFamily="49" charset="0"/>
+              </a:rPr>
+              <a:t>mycontainer</a:t>
+            </a:r>
+            <a:endParaRPr lang="en-US" sz="1200" dirty="0">
+              <a:solidFill>
+                <a:srgbClr val="0070C0"/>
+              </a:solidFill>
+              <a:latin typeface="Menlo" panose="020B0609030804020204" pitchFamily="49" charset="0"/>
+              <a:ea typeface="Menlo" panose="020B0609030804020204" pitchFamily="49" charset="0"/>
+              <a:cs typeface="Menlo" panose="020B0609030804020204" pitchFamily="49" charset="0"/>
+            </a:endParaRPr>
+          </a:p>
+          <a:p>
+            <a:endParaRPr lang="en-US" sz="1200" dirty="0">
+              <a:solidFill>
+                <a:srgbClr val="0070C0"/>
+              </a:solidFill>
+              <a:latin typeface="Menlo" panose="020B0609030804020204" pitchFamily="49" charset="0"/>
+              <a:ea typeface="Menlo" panose="020B0609030804020204" pitchFamily="49" charset="0"/>
+              <a:cs typeface="Menlo" panose="020B0609030804020204" pitchFamily="49" charset="0"/>
+            </a:endParaRPr>
+          </a:p>
+          <a:p>
+            <a:r>
+              <a:rPr lang="en-US" sz="1200" dirty="0">
+                <a:solidFill>
+                  <a:srgbClr val="0070C0"/>
+                </a:solidFill>
+                <a:latin typeface="Menlo" panose="020B0609030804020204" pitchFamily="49" charset="0"/>
+                <a:ea typeface="Menlo" panose="020B0609030804020204" pitchFamily="49" charset="0"/>
+                <a:cs typeface="Menlo" panose="020B0609030804020204" pitchFamily="49" charset="0"/>
+              </a:rPr>
+              <a:t>docker stop </a:t>
+            </a:r>
+            <a:r>
+              <a:rPr lang="en-US" sz="1200" dirty="0" err="1">
+                <a:solidFill>
+                  <a:srgbClr val="0070C0"/>
+                </a:solidFill>
+                <a:latin typeface="Menlo" panose="020B0609030804020204" pitchFamily="49" charset="0"/>
+                <a:ea typeface="Menlo" panose="020B0609030804020204" pitchFamily="49" charset="0"/>
+                <a:cs typeface="Menlo" panose="020B0609030804020204" pitchFamily="49" charset="0"/>
+              </a:rPr>
+              <a:t>mycontainer</a:t>
+            </a:r>
+            <a:endParaRPr lang="en-US" sz="1200" dirty="0">
+              <a:solidFill>
+                <a:srgbClr val="0070C0"/>
+              </a:solidFill>
+              <a:latin typeface="Menlo" panose="020B0609030804020204" pitchFamily="49" charset="0"/>
+              <a:ea typeface="Menlo" panose="020B0609030804020204" pitchFamily="49" charset="0"/>
+              <a:cs typeface="Menlo" panose="020B0609030804020204" pitchFamily="49" charset="0"/>
+            </a:endParaRPr>
+          </a:p>
+          <a:p>
+            <a:r>
+              <a:rPr lang="en-US" sz="1200" dirty="0">
+                <a:solidFill>
+                  <a:srgbClr val="0070C0"/>
+                </a:solidFill>
+                <a:latin typeface="Menlo" panose="020B0609030804020204" pitchFamily="49" charset="0"/>
+                <a:ea typeface="Menlo" panose="020B0609030804020204" pitchFamily="49" charset="0"/>
+                <a:cs typeface="Menlo" panose="020B0609030804020204" pitchFamily="49" charset="0"/>
+              </a:rPr>
+              <a:t>docker start </a:t>
+            </a:r>
+            <a:r>
+              <a:rPr lang="en-US" sz="1200" dirty="0" err="1">
+                <a:solidFill>
+                  <a:srgbClr val="0070C0"/>
+                </a:solidFill>
+                <a:latin typeface="Menlo" panose="020B0609030804020204" pitchFamily="49" charset="0"/>
+                <a:ea typeface="Menlo" panose="020B0609030804020204" pitchFamily="49" charset="0"/>
+                <a:cs typeface="Menlo" panose="020B0609030804020204" pitchFamily="49" charset="0"/>
+              </a:rPr>
+              <a:t>mycontainer</a:t>
+            </a:r>
+            <a:endParaRPr lang="en-US" sz="1200" dirty="0">
+              <a:solidFill>
+                <a:srgbClr val="0070C0"/>
+              </a:solidFill>
+              <a:latin typeface="Menlo" panose="020B0609030804020204" pitchFamily="49" charset="0"/>
+              <a:ea typeface="Menlo" panose="020B0609030804020204" pitchFamily="49" charset="0"/>
+              <a:cs typeface="Menlo" panose="020B0609030804020204" pitchFamily="49" charset="0"/>
+            </a:endParaRPr>
+          </a:p>
+          <a:p>
+            <a:endParaRPr lang="en-US" sz="1200" dirty="0">
+              <a:solidFill>
+                <a:srgbClr val="0070C0"/>
+              </a:solidFill>
+              <a:latin typeface="Menlo" panose="020B0609030804020204" pitchFamily="49" charset="0"/>
+              <a:ea typeface="Menlo" panose="020B0609030804020204" pitchFamily="49" charset="0"/>
+              <a:cs typeface="Menlo" panose="020B0609030804020204" pitchFamily="49" charset="0"/>
+            </a:endParaRPr>
+          </a:p>
+          <a:p>
+            <a:r>
+              <a:rPr lang="en-US" sz="1200" dirty="0">
+                <a:solidFill>
+                  <a:srgbClr val="0070C0"/>
+                </a:solidFill>
+                <a:latin typeface="Menlo" panose="020B0609030804020204" pitchFamily="49" charset="0"/>
+                <a:ea typeface="Menlo" panose="020B0609030804020204" pitchFamily="49" charset="0"/>
+                <a:cs typeface="Menlo" panose="020B0609030804020204" pitchFamily="49" charset="0"/>
+              </a:rPr>
+              <a:t>docker exec -it </a:t>
+            </a:r>
+            <a:r>
+              <a:rPr lang="en-US" sz="1200" dirty="0" err="1">
+                <a:solidFill>
+                  <a:srgbClr val="0070C0"/>
+                </a:solidFill>
+                <a:latin typeface="Menlo" panose="020B0609030804020204" pitchFamily="49" charset="0"/>
+                <a:ea typeface="Menlo" panose="020B0609030804020204" pitchFamily="49" charset="0"/>
+                <a:cs typeface="Menlo" panose="020B0609030804020204" pitchFamily="49" charset="0"/>
+              </a:rPr>
+              <a:t>mycontainer</a:t>
+            </a:r>
+            <a:r>
+              <a:rPr lang="en-US" sz="1200" dirty="0">
+                <a:solidFill>
+                  <a:srgbClr val="0070C0"/>
+                </a:solidFill>
+                <a:latin typeface="Menlo" panose="020B0609030804020204" pitchFamily="49" charset="0"/>
+                <a:ea typeface="Menlo" panose="020B0609030804020204" pitchFamily="49" charset="0"/>
+                <a:cs typeface="Menlo" panose="020B0609030804020204" pitchFamily="49" charset="0"/>
+              </a:rPr>
+              <a:t>  /bin/bash</a:t>
+            </a:r>
+          </a:p>
+          <a:p>
+            <a:endParaRPr lang="en-US" sz="1200" dirty="0">
+              <a:solidFill>
+                <a:srgbClr val="0070C0"/>
+              </a:solidFill>
+              <a:latin typeface="Menlo" panose="020B0609030804020204" pitchFamily="49" charset="0"/>
+              <a:ea typeface="Menlo" panose="020B0609030804020204" pitchFamily="49" charset="0"/>
+              <a:cs typeface="Menlo" panose="020B0609030804020204" pitchFamily="49" charset="0"/>
+            </a:endParaRPr>
+          </a:p>
+          <a:p>
+            <a:r>
+              <a:rPr lang="en-US" sz="1200" dirty="0">
+                <a:solidFill>
+                  <a:srgbClr val="0070C0"/>
+                </a:solidFill>
+                <a:latin typeface="Menlo" panose="020B0609030804020204" pitchFamily="49" charset="0"/>
+                <a:ea typeface="Menlo" panose="020B0609030804020204" pitchFamily="49" charset="0"/>
+                <a:cs typeface="Menlo" panose="020B0609030804020204" pitchFamily="49" charset="0"/>
+              </a:rPr>
+              <a:t>docker exec -it </a:t>
+            </a:r>
+            <a:r>
+              <a:rPr lang="en-US" sz="1200" dirty="0" err="1">
+                <a:solidFill>
+                  <a:srgbClr val="0070C0"/>
+                </a:solidFill>
+                <a:latin typeface="Menlo" panose="020B0609030804020204" pitchFamily="49" charset="0"/>
+                <a:ea typeface="Menlo" panose="020B0609030804020204" pitchFamily="49" charset="0"/>
+                <a:cs typeface="Menlo" panose="020B0609030804020204" pitchFamily="49" charset="0"/>
+              </a:rPr>
+              <a:t>mycontainer</a:t>
+            </a:r>
+            <a:r>
+              <a:rPr lang="en-US" sz="1200" dirty="0">
+                <a:solidFill>
+                  <a:srgbClr val="0070C0"/>
+                </a:solidFill>
+                <a:latin typeface="Menlo" panose="020B0609030804020204" pitchFamily="49" charset="0"/>
+                <a:ea typeface="Menlo" panose="020B0609030804020204" pitchFamily="49" charset="0"/>
+                <a:cs typeface="Menlo" panose="020B0609030804020204" pitchFamily="49" charset="0"/>
+              </a:rPr>
+              <a:t>  </a:t>
+            </a:r>
+            <a:r>
+              <a:rPr lang="en-US" sz="1200" dirty="0" err="1">
+                <a:solidFill>
+                  <a:srgbClr val="0070C0"/>
+                </a:solidFill>
+                <a:latin typeface="Menlo" panose="020B0609030804020204" pitchFamily="49" charset="0"/>
+                <a:ea typeface="Menlo" panose="020B0609030804020204" pitchFamily="49" charset="0"/>
+                <a:cs typeface="Menlo" panose="020B0609030804020204" pitchFamily="49" charset="0"/>
+              </a:rPr>
+              <a:t>service_start</a:t>
+            </a:r>
+            <a:endParaRPr lang="en-US" sz="1200" dirty="0">
+              <a:solidFill>
+                <a:srgbClr val="0070C0"/>
+              </a:solidFill>
+              <a:latin typeface="Menlo" panose="020B0609030804020204" pitchFamily="49" charset="0"/>
+              <a:ea typeface="Menlo" panose="020B0609030804020204" pitchFamily="49" charset="0"/>
+              <a:cs typeface="Menlo" panose="020B0609030804020204" pitchFamily="49" charset="0"/>
+            </a:endParaRPr>
+          </a:p>
+          <a:p>
+            <a:endParaRPr lang="en-US" sz="1200" dirty="0">
+              <a:solidFill>
+                <a:srgbClr val="0070C0"/>
+              </a:solidFill>
+              <a:latin typeface="Menlo" panose="020B0609030804020204" pitchFamily="49" charset="0"/>
+              <a:ea typeface="Menlo" panose="020B0609030804020204" pitchFamily="49" charset="0"/>
+              <a:cs typeface="Menlo" panose="020B0609030804020204" pitchFamily="49" charset="0"/>
+            </a:endParaRPr>
+          </a:p>
+          <a:p>
+            <a:r>
+              <a:rPr lang="en-US" sz="1200" dirty="0">
+                <a:solidFill>
+                  <a:srgbClr val="0070C0"/>
+                </a:solidFill>
+                <a:latin typeface="Menlo" panose="020B0609030804020204" pitchFamily="49" charset="0"/>
+                <a:ea typeface="Menlo" panose="020B0609030804020204" pitchFamily="49" charset="0"/>
+                <a:cs typeface="Menlo" panose="020B0609030804020204" pitchFamily="49" charset="0"/>
+              </a:rPr>
+              <a:t>docker rm </a:t>
+            </a:r>
+            <a:r>
+              <a:rPr lang="en-US" sz="1200" dirty="0" err="1">
+                <a:solidFill>
+                  <a:srgbClr val="0070C0"/>
+                </a:solidFill>
+                <a:latin typeface="Menlo" panose="020B0609030804020204" pitchFamily="49" charset="0"/>
+                <a:ea typeface="Menlo" panose="020B0609030804020204" pitchFamily="49" charset="0"/>
+                <a:cs typeface="Menlo" panose="020B0609030804020204" pitchFamily="49" charset="0"/>
+              </a:rPr>
+              <a:t>mycontainer</a:t>
+            </a:r>
+            <a:endParaRPr lang="en-US" sz="1200" dirty="0">
+              <a:solidFill>
+                <a:srgbClr val="0070C0"/>
+              </a:solidFill>
+              <a:latin typeface="Menlo" panose="020B0609030804020204" pitchFamily="49" charset="0"/>
+              <a:ea typeface="Menlo" panose="020B0609030804020204" pitchFamily="49" charset="0"/>
+              <a:cs typeface="Menlo" panose="020B0609030804020204" pitchFamily="49" charset="0"/>
+            </a:endParaRPr>
           </a:p>
         </p:txBody>
       </p:sp>
